--- a/dist/초5/사회·역사/국토와생활/초5_사회·역사_국토와생활_02_국토의자연환경_학생용.pptx
+++ b/dist/초5/사회·역사/국토와생활/초5_사회·역사_국토와생활_02_국토의자연환경_학생용.pptx
@@ -120,13 +120,13 @@
   <p:extLst>
     <p:ext uri="{521415D9-36F7-43E2-AB2F-B90AF26B5E84}">
       <p14:sectionLst xmlns:p14="http://schemas.microsoft.com/office/powerpoint/2010/main">
-        <p14:section name="도입" id="{72d21eae-1f9e-f96b-6cc0-3bef5cd9ace7}">
+        <p14:section name="도입" id="{9b29383f-bc13-ac7d-347d-0a15fa191958}">
           <p14:sldIdLst>
             <p14:sldId id="256"/>
             <p14:sldId id="257"/>
           </p14:sldIdLst>
         </p14:section>
-        <p14:section name="개념" id="{30e4ec0e-78e3-ff9a-b43c-4859d7f85e21}">
+        <p14:section name="개념" id="{013c6232-4b1e-d916-67ec-b2eb28f78582}">
           <p14:sldIdLst>
             <p14:sldId id="258"/>
             <p14:sldId id="261"/>
@@ -134,7 +134,7 @@
             <p14:sldId id="264"/>
           </p14:sldIdLst>
         </p14:section>
-        <p14:section name="연습" id="{fa69dfaf-1d9a-ae62-58ad-036399f173a7}">
+        <p14:section name="연습" id="{8f827c87-2b5e-ad26-b20f-212e1cbcf085}">
           <p14:sldIdLst>
             <p14:sldId id="259"/>
             <p14:sldId id="260"/>
@@ -142,30 +142,30 @@
             <p14:sldId id="265"/>
           </p14:sldIdLst>
         </p14:section>
-        <p14:section name="개념" id="{ec0856f6-3783-5475-47a6-6a1c7d997c1a}">
+        <p14:section name="개념" id="{7046765b-6074-f5e4-4eb4-7086cbb051e5}">
           <p14:sldIdLst/>
         </p14:section>
-        <p14:section name="연습" id="{6490c994-26b1-ea43-90ff-c15a4734c010}">
+        <p14:section name="연습" id="{a7d20ca5-cacc-af79-f79f-a289dc915b76}">
           <p14:sldIdLst/>
         </p14:section>
-        <p14:section name="개념" id="{f4b0406a-7212-d4d7-7094-d7809a585233}">
+        <p14:section name="개념" id="{5e29ff4b-e2d7-a834-0752-8c469576d4f6}">
           <p14:sldIdLst/>
         </p14:section>
-        <p14:section name="연습" id="{07c1f7ca-f266-1325-2f31-6546183cdc71}">
+        <p14:section name="연습" id="{191e2754-8436-8196-c820-c07d9d6256f3}">
           <p14:sldIdLst/>
         </p14:section>
-        <p14:section name="확인" id="{3312e984-29fe-4a9a-b174-b8e3c02b78fd}">
+        <p14:section name="확인" id="{22853ed7-f8e0-dac4-7081-cdf62143f559}">
           <p14:sldIdLst>
             <p14:sldId id="266"/>
             <p14:sldId id="267"/>
           </p14:sldIdLst>
         </p14:section>
-        <p14:section name="정리" id="{60781d4f-3d90-9069-1129-f7bd4e8c230d}">
+        <p14:section name="정리" id="{77337314-0a7e-3c51-4e7a-4e27c4f15483}">
           <p14:sldIdLst>
             <p14:sldId id="268"/>
           </p14:sldIdLst>
         </p14:section>
-        <p14:section name="보충" id="{d8d40a1b-0004-3df9-ef03-0cfa662945cf}">
+        <p14:section name="보충" id="{9ad122d5-7a79-74b5-e625-e3a3b67b5784}">
           <p14:sldIdLst>
             <p14:sldId id="269"/>
           </p14:sldIdLst>
